--- a/Report_Presentation/MentalHealth_NLP_Presentation .pptx
+++ b/Report_Presentation/MentalHealth_NLP_Presentation .pptx
@@ -1506,7 +1506,7 @@
                 <a:ea typeface="Calibri" pitchFamily="34" charset="-122"/>
                 <a:cs typeface="Calibri" pitchFamily="34" charset="-120"/>
               </a:rPr>
-              <a:t>CHITKARA UNIVERSITY</a:t>
+              <a:t>CHITKAR UNIVERSITY</a:t>
             </a:r>
             <a:endParaRPr lang="en-US" sz="1000" dirty="0"/>
           </a:p>
@@ -1679,7 +1679,7 @@
                 <a:ea typeface="Calibri" pitchFamily="34" charset="-122"/>
                 <a:cs typeface="Calibri" pitchFamily="34" charset="-120"/>
               </a:rPr>
-              <a:t>Akshat Vashisht  2210991229</a:t>
+              <a:t>Aakash Thakur 2210991108      Akshat Vashisht  2210991229</a:t>
             </a:r>
             <a:endParaRPr lang="en-US" sz="1500" dirty="0"/>
           </a:p>
@@ -1819,6 +1819,36 @@
           </a:p>
         </p:txBody>
       </p:sp>
+      <p:pic>
+        <p:nvPicPr>
+          <p:cNvPr id="17" name="Picture 16">
+            <a:extLst>
+              <a:ext uri="{FF2B5EF4-FFF2-40B4-BE49-F238E27FC236}">
+                <a16:creationId xmlns:a16="http://schemas.microsoft.com/office/drawing/2014/main" id="{8A64AB6E-3BF6-847C-A542-5E177833735E}"/>
+              </a:ext>
+            </a:extLst>
+          </p:cNvPr>
+          <p:cNvPicPr>
+            <a:picLocks noChangeAspect="1"/>
+          </p:cNvPicPr>
+          <p:nvPr/>
+        </p:nvPicPr>
+        <p:blipFill>
+          <a:blip r:embed="rId3"/>
+          <a:stretch>
+            <a:fillRect/>
+          </a:stretch>
+        </p:blipFill>
+        <p:spPr>
+          <a:xfrm>
+            <a:off x="7761767" y="0"/>
+            <a:ext cx="1382233" cy="457200"/>
+          </a:xfrm>
+          <a:prstGeom prst="rect">
+            <a:avLst/>
+          </a:prstGeom>
+        </p:spPr>
+      </p:pic>
     </p:spTree>
   </p:cSld>
   <p:clrMapOvr>
@@ -2013,7 +2043,7 @@
                 <a:ea typeface="Calibri" pitchFamily="34" charset="-122"/>
                 <a:cs typeface="Calibri" pitchFamily="34" charset="-120"/>
               </a:rPr>
-              <a:t>Akshat Vashisht  |  2210991229</a:t>
+              <a:t>Aakash Thakur | 2210991108          Akshat Vashisht  |  2210991229</a:t>
             </a:r>
             <a:endParaRPr lang="en-US" sz="1300" dirty="0"/>
           </a:p>
@@ -2036,6 +2066,36 @@
           </a:p>
         </p:txBody>
       </p:sp>
+      <p:pic>
+        <p:nvPicPr>
+          <p:cNvPr id="7" name="Picture 6">
+            <a:extLst>
+              <a:ext uri="{FF2B5EF4-FFF2-40B4-BE49-F238E27FC236}">
+                <a16:creationId xmlns:a16="http://schemas.microsoft.com/office/drawing/2014/main" id="{A8B31586-8320-D09D-BE1E-DA73F6BFC578}"/>
+              </a:ext>
+            </a:extLst>
+          </p:cNvPr>
+          <p:cNvPicPr>
+            <a:picLocks noChangeAspect="1"/>
+          </p:cNvPicPr>
+          <p:nvPr/>
+        </p:nvPicPr>
+        <p:blipFill>
+          <a:blip r:embed="rId3"/>
+          <a:stretch>
+            <a:fillRect/>
+          </a:stretch>
+        </p:blipFill>
+        <p:spPr>
+          <a:xfrm>
+            <a:off x="7602132" y="11181"/>
+            <a:ext cx="1267548" cy="419266"/>
+          </a:xfrm>
+          <a:prstGeom prst="rect">
+            <a:avLst/>
+          </a:prstGeom>
+        </p:spPr>
+      </p:pic>
     </p:spTree>
   </p:cSld>
   <p:clrMapOvr>
@@ -2670,6 +2730,36 @@
           </a:p>
         </p:txBody>
       </p:sp>
+      <p:pic>
+        <p:nvPicPr>
+          <p:cNvPr id="19" name="Picture 18">
+            <a:extLst>
+              <a:ext uri="{FF2B5EF4-FFF2-40B4-BE49-F238E27FC236}">
+                <a16:creationId xmlns:a16="http://schemas.microsoft.com/office/drawing/2014/main" id="{954B6217-F4E3-E142-5FD8-E7994C805171}"/>
+              </a:ext>
+            </a:extLst>
+          </p:cNvPr>
+          <p:cNvPicPr>
+            <a:picLocks noChangeAspect="1"/>
+          </p:cNvPicPr>
+          <p:nvPr/>
+        </p:nvPicPr>
+        <p:blipFill>
+          <a:blip r:embed="rId3"/>
+          <a:stretch>
+            <a:fillRect/>
+          </a:stretch>
+        </p:blipFill>
+        <p:spPr>
+          <a:xfrm>
+            <a:off x="7761767" y="45720"/>
+            <a:ext cx="1382233" cy="457200"/>
+          </a:xfrm>
+          <a:prstGeom prst="rect">
+            <a:avLst/>
+          </a:prstGeom>
+        </p:spPr>
+      </p:pic>
     </p:spTree>
   </p:cSld>
   <p:clrMapOvr>
@@ -3455,6 +3545,36 @@
           </a:p>
         </p:txBody>
       </p:sp>
+      <p:pic>
+        <p:nvPicPr>
+          <p:cNvPr id="25" name="Picture 24">
+            <a:extLst>
+              <a:ext uri="{FF2B5EF4-FFF2-40B4-BE49-F238E27FC236}">
+                <a16:creationId xmlns:a16="http://schemas.microsoft.com/office/drawing/2014/main" id="{B4DA3C62-FF88-88D8-DE03-C6D9B1CAB254}"/>
+              </a:ext>
+            </a:extLst>
+          </p:cNvPr>
+          <p:cNvPicPr>
+            <a:picLocks noChangeAspect="1"/>
+          </p:cNvPicPr>
+          <p:nvPr/>
+        </p:nvPicPr>
+        <p:blipFill>
+          <a:blip r:embed="rId3"/>
+          <a:stretch>
+            <a:fillRect/>
+          </a:stretch>
+        </p:blipFill>
+        <p:spPr>
+          <a:xfrm>
+            <a:off x="7761767" y="109728"/>
+            <a:ext cx="1382233" cy="457200"/>
+          </a:xfrm>
+          <a:prstGeom prst="rect">
+            <a:avLst/>
+          </a:prstGeom>
+        </p:spPr>
+      </p:pic>
     </p:spTree>
   </p:cSld>
   <p:clrMapOvr>
@@ -4747,6 +4867,36 @@
           </a:p>
         </p:txBody>
       </p:sp>
+      <p:pic>
+        <p:nvPicPr>
+          <p:cNvPr id="36" name="Picture 35">
+            <a:extLst>
+              <a:ext uri="{FF2B5EF4-FFF2-40B4-BE49-F238E27FC236}">
+                <a16:creationId xmlns:a16="http://schemas.microsoft.com/office/drawing/2014/main" id="{3019D979-19B0-64D9-B279-7BEF8EF7EB98}"/>
+              </a:ext>
+            </a:extLst>
+          </p:cNvPr>
+          <p:cNvPicPr>
+            <a:picLocks noChangeAspect="1"/>
+          </p:cNvPicPr>
+          <p:nvPr/>
+        </p:nvPicPr>
+        <p:blipFill>
+          <a:blip r:embed="rId3"/>
+          <a:stretch>
+            <a:fillRect/>
+          </a:stretch>
+        </p:blipFill>
+        <p:spPr>
+          <a:xfrm>
+            <a:off x="7716047" y="91440"/>
+            <a:ext cx="1382233" cy="457200"/>
+          </a:xfrm>
+          <a:prstGeom prst="rect">
+            <a:avLst/>
+          </a:prstGeom>
+        </p:spPr>
+      </p:pic>
     </p:spTree>
   </p:cSld>
   <p:clrMapOvr>
@@ -5479,6 +5629,36 @@
           </a:p>
         </p:txBody>
       </p:sp>
+      <p:pic>
+        <p:nvPicPr>
+          <p:cNvPr id="22" name="Picture 21">
+            <a:extLst>
+              <a:ext uri="{FF2B5EF4-FFF2-40B4-BE49-F238E27FC236}">
+                <a16:creationId xmlns:a16="http://schemas.microsoft.com/office/drawing/2014/main" id="{A0AA372B-E2FD-8805-E852-5F18E52C02AA}"/>
+              </a:ext>
+            </a:extLst>
+          </p:cNvPr>
+          <p:cNvPicPr>
+            <a:picLocks noChangeAspect="1"/>
+          </p:cNvPicPr>
+          <p:nvPr/>
+        </p:nvPicPr>
+        <p:blipFill>
+          <a:blip r:embed="rId3"/>
+          <a:stretch>
+            <a:fillRect/>
+          </a:stretch>
+        </p:blipFill>
+        <p:spPr>
+          <a:xfrm>
+            <a:off x="7761767" y="91440"/>
+            <a:ext cx="1382233" cy="457200"/>
+          </a:xfrm>
+          <a:prstGeom prst="rect">
+            <a:avLst/>
+          </a:prstGeom>
+        </p:spPr>
+      </p:pic>
     </p:spTree>
   </p:cSld>
   <p:clrMapOvr>
@@ -8423,6 +8603,36 @@
           </a:p>
         </p:txBody>
       </p:sp>
+      <p:pic>
+        <p:nvPicPr>
+          <p:cNvPr id="92" name="Picture 91">
+            <a:extLst>
+              <a:ext uri="{FF2B5EF4-FFF2-40B4-BE49-F238E27FC236}">
+                <a16:creationId xmlns:a16="http://schemas.microsoft.com/office/drawing/2014/main" id="{D768F84D-4ED8-AD20-80F5-8BA2834B83E0}"/>
+              </a:ext>
+            </a:extLst>
+          </p:cNvPr>
+          <p:cNvPicPr>
+            <a:picLocks noChangeAspect="1"/>
+          </p:cNvPicPr>
+          <p:nvPr/>
+        </p:nvPicPr>
+        <p:blipFill>
+          <a:blip r:embed="rId3"/>
+          <a:stretch>
+            <a:fillRect/>
+          </a:stretch>
+        </p:blipFill>
+        <p:spPr>
+          <a:xfrm>
+            <a:off x="7761767" y="82296"/>
+            <a:ext cx="1382233" cy="457200"/>
+          </a:xfrm>
+          <a:prstGeom prst="rect">
+            <a:avLst/>
+          </a:prstGeom>
+        </p:spPr>
+      </p:pic>
     </p:spTree>
   </p:cSld>
   <p:clrMapOvr>
@@ -9269,6 +9479,36 @@
           </a:p>
         </p:txBody>
       </p:sp>
+      <p:pic>
+        <p:nvPicPr>
+          <p:cNvPr id="26" name="Picture 25">
+            <a:extLst>
+              <a:ext uri="{FF2B5EF4-FFF2-40B4-BE49-F238E27FC236}">
+                <a16:creationId xmlns:a16="http://schemas.microsoft.com/office/drawing/2014/main" id="{00BECA05-D699-C24F-11E2-7F361464293C}"/>
+              </a:ext>
+            </a:extLst>
+          </p:cNvPr>
+          <p:cNvPicPr>
+            <a:picLocks noChangeAspect="1"/>
+          </p:cNvPicPr>
+          <p:nvPr/>
+        </p:nvPicPr>
+        <p:blipFill>
+          <a:blip r:embed="rId3"/>
+          <a:stretch>
+            <a:fillRect/>
+          </a:stretch>
+        </p:blipFill>
+        <p:spPr>
+          <a:xfrm>
+            <a:off x="7761767" y="68580"/>
+            <a:ext cx="1382233" cy="457200"/>
+          </a:xfrm>
+          <a:prstGeom prst="rect">
+            <a:avLst/>
+          </a:prstGeom>
+        </p:spPr>
+      </p:pic>
     </p:spTree>
   </p:cSld>
   <p:clrMapOvr>
@@ -9310,7 +9550,7 @@
         </p:nvSpPr>
         <p:spPr>
           <a:xfrm>
-            <a:off x="0" y="0"/>
+            <a:off x="0" y="-9144"/>
             <a:ext cx="9144000" cy="685800"/>
           </a:xfrm>
           <a:prstGeom prst="rect">
@@ -9742,6 +9982,36 @@
           </a:p>
         </p:txBody>
       </p:sp>
+      <p:pic>
+        <p:nvPicPr>
+          <p:cNvPr id="15" name="Picture 14">
+            <a:extLst>
+              <a:ext uri="{FF2B5EF4-FFF2-40B4-BE49-F238E27FC236}">
+                <a16:creationId xmlns:a16="http://schemas.microsoft.com/office/drawing/2014/main" id="{0DE21F33-A1E4-9115-DF0B-0D8EC196C2BA}"/>
+              </a:ext>
+            </a:extLst>
+          </p:cNvPr>
+          <p:cNvPicPr>
+            <a:picLocks noChangeAspect="1"/>
+          </p:cNvPicPr>
+          <p:nvPr/>
+        </p:nvPicPr>
+        <p:blipFill>
+          <a:blip r:embed="rId3"/>
+          <a:stretch>
+            <a:fillRect/>
+          </a:stretch>
+        </p:blipFill>
+        <p:spPr>
+          <a:xfrm>
+            <a:off x="7761767" y="82454"/>
+            <a:ext cx="1382233" cy="457200"/>
+          </a:xfrm>
+          <a:prstGeom prst="rect">
+            <a:avLst/>
+          </a:prstGeom>
+        </p:spPr>
+      </p:pic>
     </p:spTree>
   </p:cSld>
   <p:clrMapOvr>
@@ -10310,6 +10580,36 @@
           </a:p>
         </p:txBody>
       </p:sp>
+      <p:pic>
+        <p:nvPicPr>
+          <p:cNvPr id="16" name="Picture 15">
+            <a:extLst>
+              <a:ext uri="{FF2B5EF4-FFF2-40B4-BE49-F238E27FC236}">
+                <a16:creationId xmlns:a16="http://schemas.microsoft.com/office/drawing/2014/main" id="{154B5273-5BAF-FE2C-46E9-10D8CAD8C859}"/>
+              </a:ext>
+            </a:extLst>
+          </p:cNvPr>
+          <p:cNvPicPr>
+            <a:picLocks noChangeAspect="1"/>
+          </p:cNvPicPr>
+          <p:nvPr/>
+        </p:nvPicPr>
+        <p:blipFill>
+          <a:blip r:embed="rId3"/>
+          <a:stretch>
+            <a:fillRect/>
+          </a:stretch>
+        </p:blipFill>
+        <p:spPr>
+          <a:xfrm>
+            <a:off x="7761767" y="109728"/>
+            <a:ext cx="1382233" cy="457200"/>
+          </a:xfrm>
+          <a:prstGeom prst="rect">
+            <a:avLst/>
+          </a:prstGeom>
+        </p:spPr>
+      </p:pic>
     </p:spTree>
   </p:cSld>
   <p:clrMapOvr>
